--- a/CostVision-3D-CAD-Viewer-Study-and-Roadmap.pptx
+++ b/CostVision-3D-CAD-Viewer-Study-and-Roadmap.pptx
@@ -20,9 +20,10 @@
     <p:sldId id="268" r:id="rId14"/>
     <p:sldId id="269" r:id="rId15"/>
     <p:sldId id="270" r:id="rId16"/>
+    <p:sldId id="271" r:id="rId17"/>
   </p:sldIdLst>
   <p:notesMasterIdLst>
-    <p:notesMasterId r:id="rId17"/>
+    <p:notesMasterId r:id="rId18"/>
   </p:notesMasterIdLst>
   <p:sldSz cx="12191695" cy="6858000"/>
   <p:notesSz cx="6858000" cy="12191695"/>
@@ -1086,6 +1087,94 @@
 </p:notes>
 </file>
 
+<file path=ppt/notesSlides/notesSlide16.xml><?xml version="1.0" encoding="utf-8"?>
+<p:notes xmlns:a="http://schemas.openxmlformats.org/drawingml/2006/main" xmlns:r="http://schemas.openxmlformats.org/officeDocument/2006/relationships" xmlns:p="http://schemas.openxmlformats.org/presentationml/2006/main">
+  <p:cSld>
+    <p:spTree>
+      <p:nvGrpSpPr>
+        <p:cNvPr id="1" name=""/>
+        <p:cNvGrpSpPr/>
+        <p:nvPr/>
+      </p:nvGrpSpPr>
+      <p:grpSpPr>
+        <a:xfrm>
+          <a:off x="0" y="0"/>
+          <a:ext cx="0" cy="0"/>
+          <a:chOff x="0" y="0"/>
+          <a:chExt cx="0" cy="0"/>
+        </a:xfrm>
+      </p:grpSpPr>
+      <p:sp>
+        <p:nvSpPr>
+          <p:cNvPr id="2" name="Slide Image Placeholder 1"/>
+          <p:cNvSpPr>
+            <a:spLocks noGrp="1" noRot="1" noChangeAspect="1"/>
+          </p:cNvSpPr>
+          <p:nvPr>
+            <p:ph type="sldImg"/>
+          </p:nvPr>
+        </p:nvSpPr>
+        <p:spPr/>
+      </p:sp>
+      <p:sp>
+        <p:nvSpPr>
+          <p:cNvPr id="3" name="Notes Placeholder 2"/>
+          <p:cNvSpPr>
+            <a:spLocks noGrp="1"/>
+          </p:cNvSpPr>
+          <p:nvPr>
+            <p:ph type="body" idx="1"/>
+          </p:nvPr>
+        </p:nvSpPr>
+        <p:spPr/>
+        <p:txBody>
+          <a:bodyPr/>
+          <a:lstStyle/>
+          <a:p>
+            <a:r>
+              <a:rPr lang="en-US" dirty="0"/>
+              <a:t>This is the slide that answers the ask directly: what does the tool capture on its own, and where does it go. Left column — every item is measured off the CAD model with nothing typed in; right column — the cost driver it feeds. Volume and weight come straight from the kernel, so material is exact, not guessed; the bounding box sizes the machine and stock; body count gives assembly and BOM scope; the hole-and-boss table becomes drilling operations; wall thickness decides mould and cast feasibility; draft flags undercuts that need tool slides; face areas drive machining and paint area; and there's a first-cut cycle-time estimate. On the right, the real gear we costed — two kilos of gear steel, about twenty-two pounds ex-works from India, all in sterling. And the guardrail underneath: the AI never sets the price. It classifies; the engine does deterministic maths on the geometry, every rate traceable. That's a defensible should-cost, not a black box.</a:t>
+            </a:r>
+            <a:endParaRPr lang="en-US" dirty="0"/>
+          </a:p>
+        </p:txBody>
+      </p:sp>
+      <p:sp>
+        <p:nvSpPr>
+          <p:cNvPr id="4" name="Slide Number Placeholder 3"/>
+          <p:cNvSpPr>
+            <a:spLocks noGrp="1"/>
+          </p:cNvSpPr>
+          <p:nvPr>
+            <p:ph type="sldNum" sz="quarter" idx="10"/>
+          </p:nvPr>
+        </p:nvSpPr>
+        <p:spPr/>
+        <p:txBody>
+          <a:bodyPr/>
+          <a:lstStyle/>
+          <a:p>
+            <a:fld id="{F7021451-1387-4CA6-816F-3879F97B5CBC}" type="slidenum">
+              <a:rPr lang="en-US"/>
+              <a:t>16</a:t>
+            </a:fld>
+            <a:endParaRPr lang="en-US"/>
+          </a:p>
+        </p:txBody>
+      </p:sp>
+    </p:spTree>
+    <p:extLst>
+      <p:ext uri="{BB962C8B-B14F-4D97-AF65-F5344CB8AC3E}">
+        <p14:creationId xmlns:p14="http://schemas.microsoft.com/office/powerpoint/2010/main" val="1024086991"/>
+      </p:ext>
+    </p:extLst>
+  </p:cSld>
+  <p:clrMapOvr>
+    <a:masterClrMapping/>
+  </p:clrMapOvr>
+</p:notes>
+</file>
+
 <file path=ppt/notesSlides/notesSlide2.xml><?xml version="1.0" encoding="utf-8"?>
 <p:notes xmlns:a="http://schemas.openxmlformats.org/drawingml/2006/main" xmlns:r="http://schemas.openxmlformats.org/officeDocument/2006/relationships" xmlns:p="http://schemas.openxmlformats.org/presentationml/2006/main">
   <p:cSld>
@@ -9833,6 +9922,1762 @@
               <a:t> — the bigger viewer plus painting the data we already compute, ~1–2 weeks. It delivers both of your asks fastest and de-risks the rest. Then take Phases 1–2 as a fast-follow. Phase 3 (graph-neural AFR) stays a research track we green-light once the visible gap is closed.</a:t>
             </a:r>
             <a:endParaRPr lang="en-US" sz="1100" dirty="0"/>
+          </a:p>
+        </p:txBody>
+      </p:sp>
+    </p:spTree>
+  </p:cSld>
+  <p:clrMapOvr>
+    <a:masterClrMapping/>
+  </p:clrMapOvr>
+</p:sld>
+</file>
+
+<file path=ppt/slides/slide16.xml><?xml version="1.0" encoding="utf-8"?>
+<p:sld xmlns:a="http://schemas.openxmlformats.org/drawingml/2006/main" xmlns:r="http://schemas.openxmlformats.org/officeDocument/2006/relationships" xmlns:p="http://schemas.openxmlformats.org/presentationml/2006/main">
+  <p:cSld name="Slide 16">
+    <p:spTree>
+      <p:nvGrpSpPr>
+        <p:cNvPr id="1" name=""/>
+        <p:cNvGrpSpPr/>
+        <p:nvPr/>
+      </p:nvGrpSpPr>
+      <p:grpSpPr>
+        <a:xfrm>
+          <a:off x="0" y="0"/>
+          <a:ext cx="0" cy="0"/>
+          <a:chOff x="0" y="0"/>
+          <a:chExt cx="0" cy="0"/>
+        </a:xfrm>
+      </p:grpSpPr>
+      <p:sp>
+        <p:nvSpPr>
+          <p:cNvPr id="2" name="Shape 0"/>
+          <p:cNvSpPr/>
+          <p:nvPr/>
+        </p:nvSpPr>
+        <p:spPr>
+          <a:xfrm>
+            <a:off x="0" y="0"/>
+            <a:ext cx="12191695" cy="6858000"/>
+          </a:xfrm>
+          <a:prstGeom prst="rect">
+            <a:avLst/>
+          </a:prstGeom>
+          <a:solidFill>
+            <a:srgbClr val="0B0F17"/>
+          </a:solidFill>
+          <a:ln/>
+        </p:spPr>
+      </p:sp>
+      <p:sp>
+        <p:nvSpPr>
+          <p:cNvPr id="3" name="Shape 1"/>
+          <p:cNvSpPr/>
+          <p:nvPr/>
+        </p:nvSpPr>
+        <p:spPr>
+          <a:xfrm>
+            <a:off x="365760" y="310896"/>
+            <a:ext cx="365760" cy="365760"/>
+          </a:xfrm>
+          <a:prstGeom prst="roundRect">
+            <a:avLst>
+              <a:gd name="adj" fmla="val 25000"/>
+            </a:avLst>
+          </a:prstGeom>
+          <a:solidFill>
+            <a:srgbClr val="22D3EE"/>
+          </a:solidFill>
+          <a:ln/>
+        </p:spPr>
+      </p:sp>
+      <p:sp>
+        <p:nvSpPr>
+          <p:cNvPr id="4" name="Text 2"/>
+          <p:cNvSpPr/>
+          <p:nvPr/>
+        </p:nvSpPr>
+        <p:spPr>
+          <a:xfrm>
+            <a:off x="365760" y="310896"/>
+            <a:ext cx="365760" cy="365760"/>
+          </a:xfrm>
+          <a:prstGeom prst="rect">
+            <a:avLst/>
+          </a:prstGeom>
+          <a:noFill/>
+          <a:ln/>
+        </p:spPr>
+        <p:txBody>
+          <a:bodyPr wrap="square" lIns="0" tIns="0" rIns="0" bIns="0" rtlCol="0" anchor="ctr"/>
+          <a:lstStyle/>
+          <a:p>
+            <a:pPr algn="ctr" indent="0" marL="0">
+              <a:buNone/>
+            </a:pPr>
+            <a:r>
+              <a:rPr lang="en-US" sz="1600" b="1" dirty="0">
+                <a:solidFill>
+                  <a:srgbClr val="0B0F17"/>
+                </a:solidFill>
+                <a:latin typeface="Calibri" pitchFamily="34" charset="0"/>
+                <a:ea typeface="Calibri" pitchFamily="34" charset="-122"/>
+                <a:cs typeface="Calibri" pitchFamily="34" charset="-120"/>
+              </a:rPr>
+              <a:t>cv</a:t>
+            </a:r>
+            <a:endParaRPr lang="en-US" sz="1600" dirty="0"/>
+          </a:p>
+        </p:txBody>
+      </p:sp>
+      <p:sp>
+        <p:nvSpPr>
+          <p:cNvPr id="5" name="Text 3"/>
+          <p:cNvSpPr/>
+          <p:nvPr/>
+        </p:nvSpPr>
+        <p:spPr>
+          <a:xfrm>
+            <a:off x="822960" y="283464"/>
+            <a:ext cx="2926080" cy="274320"/>
+          </a:xfrm>
+          <a:prstGeom prst="rect">
+            <a:avLst/>
+          </a:prstGeom>
+          <a:noFill/>
+          <a:ln/>
+        </p:spPr>
+        <p:txBody>
+          <a:bodyPr wrap="square" lIns="0" tIns="0" rIns="0" bIns="0" rtlCol="0" anchor="t"/>
+          <a:lstStyle/>
+          <a:p>
+            <a:pPr indent="0" marL="0">
+              <a:buNone/>
+            </a:pPr>
+            <a:r>
+              <a:rPr lang="en-US" sz="1600" b="1" dirty="0">
+                <a:solidFill>
+                  <a:srgbClr val="EAF0F8"/>
+                </a:solidFill>
+                <a:latin typeface="Calibri" pitchFamily="34" charset="0"/>
+                <a:ea typeface="Calibri" pitchFamily="34" charset="-122"/>
+                <a:cs typeface="Calibri" pitchFamily="34" charset="-120"/>
+              </a:rPr>
+              <a:t>CostVision</a:t>
+            </a:r>
+            <a:endParaRPr lang="en-US" sz="1600" dirty="0"/>
+          </a:p>
+        </p:txBody>
+      </p:sp>
+      <p:sp>
+        <p:nvSpPr>
+          <p:cNvPr id="6" name="Text 4"/>
+          <p:cNvSpPr/>
+          <p:nvPr/>
+        </p:nvSpPr>
+        <p:spPr>
+          <a:xfrm>
+            <a:off x="822960" y="512064"/>
+            <a:ext cx="3108960" cy="182880"/>
+          </a:xfrm>
+          <a:prstGeom prst="rect">
+            <a:avLst/>
+          </a:prstGeom>
+          <a:noFill/>
+          <a:ln/>
+        </p:spPr>
+        <p:txBody>
+          <a:bodyPr wrap="square" lIns="0" tIns="0" rIns="0" bIns="0" rtlCol="0" anchor="t"/>
+          <a:lstStyle/>
+          <a:p>
+            <a:pPr indent="0" marL="0">
+              <a:buNone/>
+            </a:pPr>
+            <a:r>
+              <a:rPr lang="en-US" sz="700" spc="150" kern="0" dirty="0">
+                <a:solidFill>
+                  <a:srgbClr val="5C6B85"/>
+                </a:solidFill>
+                <a:latin typeface="Calibri" pitchFamily="34" charset="0"/>
+                <a:ea typeface="Calibri" pitchFamily="34" charset="-122"/>
+                <a:cs typeface="Calibri" pitchFamily="34" charset="-120"/>
+              </a:rPr>
+              <a:t>CAD-TO-COST  INTELLIGENCE</a:t>
+            </a:r>
+            <a:endParaRPr lang="en-US" sz="700" dirty="0"/>
+          </a:p>
+        </p:txBody>
+      </p:sp>
+      <p:sp>
+        <p:nvSpPr>
+          <p:cNvPr id="7" name="Shape 5"/>
+          <p:cNvSpPr/>
+          <p:nvPr/>
+        </p:nvSpPr>
+        <p:spPr>
+          <a:xfrm>
+            <a:off x="0" y="841248"/>
+            <a:ext cx="12191695" cy="20117"/>
+          </a:xfrm>
+          <a:prstGeom prst="rect">
+            <a:avLst/>
+          </a:prstGeom>
+          <a:solidFill>
+            <a:srgbClr val="22D3EE"/>
+          </a:solidFill>
+          <a:ln/>
+        </p:spPr>
+      </p:sp>
+      <p:sp>
+        <p:nvSpPr>
+          <p:cNvPr id="8" name="Text 6"/>
+          <p:cNvSpPr/>
+          <p:nvPr/>
+        </p:nvSpPr>
+        <p:spPr>
+          <a:xfrm>
+            <a:off x="411480" y="987552"/>
+            <a:ext cx="11338560" cy="256032"/>
+          </a:xfrm>
+          <a:prstGeom prst="rect">
+            <a:avLst/>
+          </a:prstGeom>
+          <a:noFill/>
+          <a:ln/>
+        </p:spPr>
+        <p:txBody>
+          <a:bodyPr wrap="square" lIns="0" tIns="0" rIns="0" bIns="0" rtlCol="0" anchor="t"/>
+          <a:lstStyle/>
+          <a:p>
+            <a:pPr indent="0" marL="0">
+              <a:buNone/>
+            </a:pPr>
+            <a:r>
+              <a:rPr lang="en-US" sz="1050" b="1" spc="50" kern="0" dirty="0">
+                <a:solidFill>
+                  <a:srgbClr val="22D3EE"/>
+                </a:solidFill>
+                <a:latin typeface="Calibri" pitchFamily="34" charset="0"/>
+                <a:ea typeface="Calibri" pitchFamily="34" charset="-122"/>
+                <a:cs typeface="Calibri" pitchFamily="34" charset="-120"/>
+              </a:rPr>
+              <a:t>CAD-TO-COST · ZERO MANUAL ENTRY</a:t>
+            </a:r>
+            <a:endParaRPr lang="en-US" sz="1050" dirty="0"/>
+          </a:p>
+        </p:txBody>
+      </p:sp>
+      <p:sp>
+        <p:nvSpPr>
+          <p:cNvPr id="9" name="Text 7"/>
+          <p:cNvSpPr/>
+          <p:nvPr/>
+        </p:nvSpPr>
+        <p:spPr>
+          <a:xfrm>
+            <a:off x="411480" y="1243584"/>
+            <a:ext cx="11384280" cy="566928"/>
+          </a:xfrm>
+          <a:prstGeom prst="rect">
+            <a:avLst/>
+          </a:prstGeom>
+          <a:noFill/>
+          <a:ln/>
+        </p:spPr>
+        <p:txBody>
+          <a:bodyPr wrap="square" lIns="0" tIns="0" rIns="0" bIns="0" rtlCol="0" anchor="t"/>
+          <a:lstStyle/>
+          <a:p>
+            <a:pPr indent="0" marL="0">
+              <a:buNone/>
+            </a:pPr>
+            <a:r>
+              <a:rPr lang="en-US" sz="2500" b="1" dirty="0">
+                <a:solidFill>
+                  <a:srgbClr val="EAF0F8"/>
+                </a:solidFill>
+                <a:latin typeface="Calibri" pitchFamily="34" charset="0"/>
+                <a:ea typeface="Calibri" pitchFamily="34" charset="-122"/>
+                <a:cs typeface="Calibri" pitchFamily="34" charset="-120"/>
+              </a:rPr>
+              <a:t>What the Viewer Captures — Fed Straight to the Cost Engine</a:t>
+            </a:r>
+            <a:endParaRPr lang="en-US" sz="2500" dirty="0"/>
+          </a:p>
+        </p:txBody>
+      </p:sp>
+      <p:sp>
+        <p:nvSpPr>
+          <p:cNvPr id="10" name="Text 8"/>
+          <p:cNvSpPr/>
+          <p:nvPr/>
+        </p:nvSpPr>
+        <p:spPr>
+          <a:xfrm>
+            <a:off x="411480" y="6510528"/>
+            <a:ext cx="11384280" cy="256032"/>
+          </a:xfrm>
+          <a:prstGeom prst="rect">
+            <a:avLst/>
+          </a:prstGeom>
+          <a:noFill/>
+          <a:ln/>
+        </p:spPr>
+        <p:txBody>
+          <a:bodyPr wrap="square" lIns="0" tIns="0" rIns="0" bIns="0" rtlCol="0" anchor="t"/>
+          <a:lstStyle/>
+          <a:p>
+            <a:pPr algn="ctr" indent="0" marL="0">
+              <a:buNone/>
+            </a:pPr>
+            <a:r>
+              <a:rPr lang="en-US" sz="750" dirty="0">
+                <a:solidFill>
+                  <a:srgbClr val="5C6B85"/>
+                </a:solidFill>
+                <a:latin typeface="Calibri" pitchFamily="34" charset="0"/>
+                <a:ea typeface="Calibri" pitchFamily="34" charset="-122"/>
+                <a:cs typeface="Calibri" pitchFamily="34" charset="-120"/>
+              </a:rPr>
+              <a:t>CostVision  ·  Competitive study &amp; build plan  ·  Confidential</a:t>
+            </a:r>
+            <a:endParaRPr lang="en-US" sz="750" dirty="0"/>
+          </a:p>
+        </p:txBody>
+      </p:sp>
+      <p:sp>
+        <p:nvSpPr>
+          <p:cNvPr id="11" name="Shape 9"/>
+          <p:cNvSpPr/>
+          <p:nvPr/>
+        </p:nvSpPr>
+        <p:spPr>
+          <a:xfrm>
+            <a:off x="411480" y="1783080"/>
+            <a:ext cx="6766560" cy="365760"/>
+          </a:xfrm>
+          <a:prstGeom prst="roundRect">
+            <a:avLst>
+              <a:gd name="adj" fmla="val 17500"/>
+            </a:avLst>
+          </a:prstGeom>
+          <a:solidFill>
+            <a:srgbClr val="1C2536"/>
+          </a:solidFill>
+          <a:ln w="9525">
+            <a:solidFill>
+              <a:srgbClr val="2B3A52"/>
+            </a:solidFill>
+            <a:prstDash val="solid"/>
+          </a:ln>
+        </p:spPr>
+      </p:sp>
+      <p:sp>
+        <p:nvSpPr>
+          <p:cNvPr id="12" name="Text 10"/>
+          <p:cNvSpPr/>
+          <p:nvPr/>
+        </p:nvSpPr>
+        <p:spPr>
+          <a:xfrm>
+            <a:off x="548640" y="1847088"/>
+            <a:ext cx="3611880" cy="256032"/>
+          </a:xfrm>
+          <a:prstGeom prst="rect">
+            <a:avLst/>
+          </a:prstGeom>
+          <a:noFill/>
+          <a:ln/>
+        </p:spPr>
+        <p:txBody>
+          <a:bodyPr wrap="square" lIns="0" tIns="0" rIns="0" bIns="0" rtlCol="0" anchor="t"/>
+          <a:lstStyle/>
+          <a:p>
+            <a:pPr indent="0" marL="0">
+              <a:buNone/>
+            </a:pPr>
+            <a:r>
+              <a:rPr lang="en-US" sz="950" b="1" dirty="0">
+                <a:solidFill>
+                  <a:srgbClr val="EAF0F8"/>
+                </a:solidFill>
+                <a:latin typeface="Calibri" pitchFamily="34" charset="0"/>
+                <a:ea typeface="Calibri" pitchFamily="34" charset="-122"/>
+                <a:cs typeface="Calibri" pitchFamily="34" charset="-120"/>
+              </a:rPr>
+              <a:t>Auto-captured from geometry (no typing)</a:t>
+            </a:r>
+            <a:endParaRPr lang="en-US" sz="950" dirty="0"/>
+          </a:p>
+        </p:txBody>
+      </p:sp>
+      <p:sp>
+        <p:nvSpPr>
+          <p:cNvPr id="13" name="Text 11"/>
+          <p:cNvSpPr/>
+          <p:nvPr/>
+        </p:nvSpPr>
+        <p:spPr>
+          <a:xfrm>
+            <a:off x="4297680" y="1847088"/>
+            <a:ext cx="2880360" cy="256032"/>
+          </a:xfrm>
+          <a:prstGeom prst="rect">
+            <a:avLst/>
+          </a:prstGeom>
+          <a:noFill/>
+          <a:ln/>
+        </p:spPr>
+        <p:txBody>
+          <a:bodyPr wrap="square" lIns="0" tIns="0" rIns="0" bIns="0" rtlCol="0" anchor="t"/>
+          <a:lstStyle/>
+          <a:p>
+            <a:pPr indent="0" marL="0">
+              <a:buNone/>
+            </a:pPr>
+            <a:r>
+              <a:rPr lang="en-US" sz="950" b="1" dirty="0">
+                <a:solidFill>
+                  <a:srgbClr val="22D3EE"/>
+                </a:solidFill>
+                <a:latin typeface="Calibri" pitchFamily="34" charset="0"/>
+                <a:ea typeface="Calibri" pitchFamily="34" charset="-122"/>
+                <a:cs typeface="Calibri" pitchFamily="34" charset="-120"/>
+              </a:rPr>
+              <a:t>→ Feeds this cost driver</a:t>
+            </a:r>
+            <a:endParaRPr lang="en-US" sz="950" dirty="0"/>
+          </a:p>
+        </p:txBody>
+      </p:sp>
+      <p:sp>
+        <p:nvSpPr>
+          <p:cNvPr id="14" name="Shape 12"/>
+          <p:cNvSpPr/>
+          <p:nvPr/>
+        </p:nvSpPr>
+        <p:spPr>
+          <a:xfrm>
+            <a:off x="411480" y="2203704"/>
+            <a:ext cx="6766560" cy="384048"/>
+          </a:xfrm>
+          <a:prstGeom prst="roundRect">
+            <a:avLst>
+              <a:gd name="adj" fmla="val 16667"/>
+            </a:avLst>
+          </a:prstGeom>
+          <a:solidFill>
+            <a:srgbClr val="141B28"/>
+          </a:solidFill>
+          <a:ln w="6350">
+            <a:solidFill>
+              <a:srgbClr val="2B3A52"/>
+            </a:solidFill>
+            <a:prstDash val="solid"/>
+          </a:ln>
+        </p:spPr>
+      </p:sp>
+      <p:sp>
+        <p:nvSpPr>
+          <p:cNvPr id="15" name="Text 13"/>
+          <p:cNvSpPr/>
+          <p:nvPr/>
+        </p:nvSpPr>
+        <p:spPr>
+          <a:xfrm>
+            <a:off x="548640" y="2286000"/>
+            <a:ext cx="3611880" cy="256032"/>
+          </a:xfrm>
+          <a:prstGeom prst="rect">
+            <a:avLst/>
+          </a:prstGeom>
+          <a:noFill/>
+          <a:ln/>
+        </p:spPr>
+        <p:txBody>
+          <a:bodyPr wrap="square" lIns="0" tIns="0" rIns="0" bIns="0" rtlCol="0" anchor="t"/>
+          <a:lstStyle/>
+          <a:p>
+            <a:pPr indent="0" marL="0">
+              <a:buNone/>
+            </a:pPr>
+            <a:r>
+              <a:rPr lang="en-US" sz="950" b="1" dirty="0">
+                <a:solidFill>
+                  <a:srgbClr val="3B82F6"/>
+                </a:solidFill>
+                <a:latin typeface="Calibri" pitchFamily="34" charset="0"/>
+                <a:ea typeface="Calibri" pitchFamily="34" charset="-122"/>
+                <a:cs typeface="Calibri" pitchFamily="34" charset="-120"/>
+              </a:rPr>
+              <a:t>Volume — exact (OCCT kernel)</a:t>
+            </a:r>
+            <a:endParaRPr lang="en-US" sz="950" dirty="0"/>
+          </a:p>
+        </p:txBody>
+      </p:sp>
+      <p:sp>
+        <p:nvSpPr>
+          <p:cNvPr id="16" name="Text 14"/>
+          <p:cNvSpPr/>
+          <p:nvPr/>
+        </p:nvSpPr>
+        <p:spPr>
+          <a:xfrm>
+            <a:off x="4297680" y="2286000"/>
+            <a:ext cx="2880360" cy="256032"/>
+          </a:xfrm>
+          <a:prstGeom prst="rect">
+            <a:avLst/>
+          </a:prstGeom>
+          <a:noFill/>
+          <a:ln/>
+        </p:spPr>
+        <p:txBody>
+          <a:bodyPr wrap="square" lIns="0" tIns="0" rIns="0" bIns="0" rtlCol="0" anchor="t"/>
+          <a:lstStyle/>
+          <a:p>
+            <a:pPr indent="0" marL="0">
+              <a:buNone/>
+            </a:pPr>
+            <a:r>
+              <a:rPr lang="en-US" sz="950" dirty="0">
+                <a:solidFill>
+                  <a:srgbClr val="9AA7BD"/>
+                </a:solidFill>
+                <a:latin typeface="Calibri" pitchFamily="34" charset="0"/>
+                <a:ea typeface="Calibri" pitchFamily="34" charset="-122"/>
+                <a:cs typeface="Calibri" pitchFamily="34" charset="-120"/>
+              </a:rPr>
+              <a:t>Material mass · stock size</a:t>
+            </a:r>
+            <a:endParaRPr lang="en-US" sz="950" dirty="0"/>
+          </a:p>
+        </p:txBody>
+      </p:sp>
+      <p:sp>
+        <p:nvSpPr>
+          <p:cNvPr id="17" name="Shape 15"/>
+          <p:cNvSpPr/>
+          <p:nvPr/>
+        </p:nvSpPr>
+        <p:spPr>
+          <a:xfrm>
+            <a:off x="411480" y="2624328"/>
+            <a:ext cx="6766560" cy="384048"/>
+          </a:xfrm>
+          <a:prstGeom prst="roundRect">
+            <a:avLst>
+              <a:gd name="adj" fmla="val 16667"/>
+            </a:avLst>
+          </a:prstGeom>
+          <a:solidFill>
+            <a:srgbClr val="141B28"/>
+          </a:solidFill>
+          <a:ln w="6350">
+            <a:solidFill>
+              <a:srgbClr val="2B3A52"/>
+            </a:solidFill>
+            <a:prstDash val="solid"/>
+          </a:ln>
+        </p:spPr>
+      </p:sp>
+      <p:sp>
+        <p:nvSpPr>
+          <p:cNvPr id="18" name="Text 16"/>
+          <p:cNvSpPr/>
+          <p:nvPr/>
+        </p:nvSpPr>
+        <p:spPr>
+          <a:xfrm>
+            <a:off x="548640" y="2706624"/>
+            <a:ext cx="3611880" cy="256032"/>
+          </a:xfrm>
+          <a:prstGeom prst="rect">
+            <a:avLst/>
+          </a:prstGeom>
+          <a:noFill/>
+          <a:ln/>
+        </p:spPr>
+        <p:txBody>
+          <a:bodyPr wrap="square" lIns="0" tIns="0" rIns="0" bIns="0" rtlCol="0" anchor="t"/>
+          <a:lstStyle/>
+          <a:p>
+            <a:pPr indent="0" marL="0">
+              <a:buNone/>
+            </a:pPr>
+            <a:r>
+              <a:rPr lang="en-US" sz="950" b="1" dirty="0">
+                <a:solidFill>
+                  <a:srgbClr val="3B82F6"/>
+                </a:solidFill>
+                <a:latin typeface="Calibri" pitchFamily="34" charset="0"/>
+                <a:ea typeface="Calibri" pitchFamily="34" charset="-122"/>
+                <a:cs typeface="Calibri" pitchFamily="34" charset="-120"/>
+              </a:rPr>
+              <a:t>Weight = volume × density</a:t>
+            </a:r>
+            <a:endParaRPr lang="en-US" sz="950" dirty="0"/>
+          </a:p>
+        </p:txBody>
+      </p:sp>
+      <p:sp>
+        <p:nvSpPr>
+          <p:cNvPr id="19" name="Text 17"/>
+          <p:cNvSpPr/>
+          <p:nvPr/>
+        </p:nvSpPr>
+        <p:spPr>
+          <a:xfrm>
+            <a:off x="4297680" y="2706624"/>
+            <a:ext cx="2880360" cy="256032"/>
+          </a:xfrm>
+          <a:prstGeom prst="rect">
+            <a:avLst/>
+          </a:prstGeom>
+          <a:noFill/>
+          <a:ln/>
+        </p:spPr>
+        <p:txBody>
+          <a:bodyPr wrap="square" lIns="0" tIns="0" rIns="0" bIns="0" rtlCol="0" anchor="t"/>
+          <a:lstStyle/>
+          <a:p>
+            <a:pPr indent="0" marL="0">
+              <a:buNone/>
+            </a:pPr>
+            <a:r>
+              <a:rPr lang="en-US" sz="950" dirty="0">
+                <a:solidFill>
+                  <a:srgbClr val="9AA7BD"/>
+                </a:solidFill>
+                <a:latin typeface="Calibri" pitchFamily="34" charset="0"/>
+                <a:ea typeface="Calibri" pitchFamily="34" charset="-122"/>
+                <a:cs typeface="Calibri" pitchFamily="34" charset="-120"/>
+              </a:rPr>
+              <a:t>Raw-material £ (Al/steel/iron/Cu/Ti)</a:t>
+            </a:r>
+            <a:endParaRPr lang="en-US" sz="950" dirty="0"/>
+          </a:p>
+        </p:txBody>
+      </p:sp>
+      <p:sp>
+        <p:nvSpPr>
+          <p:cNvPr id="20" name="Shape 18"/>
+          <p:cNvSpPr/>
+          <p:nvPr/>
+        </p:nvSpPr>
+        <p:spPr>
+          <a:xfrm>
+            <a:off x="411480" y="3044952"/>
+            <a:ext cx="6766560" cy="384048"/>
+          </a:xfrm>
+          <a:prstGeom prst="roundRect">
+            <a:avLst>
+              <a:gd name="adj" fmla="val 16667"/>
+            </a:avLst>
+          </a:prstGeom>
+          <a:solidFill>
+            <a:srgbClr val="141B28"/>
+          </a:solidFill>
+          <a:ln w="6350">
+            <a:solidFill>
+              <a:srgbClr val="2B3A52"/>
+            </a:solidFill>
+            <a:prstDash val="solid"/>
+          </a:ln>
+        </p:spPr>
+      </p:sp>
+      <p:sp>
+        <p:nvSpPr>
+          <p:cNvPr id="21" name="Text 19"/>
+          <p:cNvSpPr/>
+          <p:nvPr/>
+        </p:nvSpPr>
+        <p:spPr>
+          <a:xfrm>
+            <a:off x="548640" y="3127248"/>
+            <a:ext cx="3611880" cy="256032"/>
+          </a:xfrm>
+          <a:prstGeom prst="rect">
+            <a:avLst/>
+          </a:prstGeom>
+          <a:noFill/>
+          <a:ln/>
+        </p:spPr>
+        <p:txBody>
+          <a:bodyPr wrap="square" lIns="0" tIns="0" rIns="0" bIns="0" rtlCol="0" anchor="t"/>
+          <a:lstStyle/>
+          <a:p>
+            <a:pPr indent="0" marL="0">
+              <a:buNone/>
+            </a:pPr>
+            <a:r>
+              <a:rPr lang="en-US" sz="950" b="1" dirty="0">
+                <a:solidFill>
+                  <a:srgbClr val="3B82F6"/>
+                </a:solidFill>
+                <a:latin typeface="Calibri" pitchFamily="34" charset="0"/>
+                <a:ea typeface="Calibri" pitchFamily="34" charset="-122"/>
+                <a:cs typeface="Calibri" pitchFamily="34" charset="-120"/>
+              </a:rPr>
+              <a:t>Bounding box / envelope</a:t>
+            </a:r>
+            <a:endParaRPr lang="en-US" sz="950" dirty="0"/>
+          </a:p>
+        </p:txBody>
+      </p:sp>
+      <p:sp>
+        <p:nvSpPr>
+          <p:cNvPr id="22" name="Text 20"/>
+          <p:cNvSpPr/>
+          <p:nvPr/>
+        </p:nvSpPr>
+        <p:spPr>
+          <a:xfrm>
+            <a:off x="4297680" y="3127248"/>
+            <a:ext cx="2880360" cy="256032"/>
+          </a:xfrm>
+          <a:prstGeom prst="rect">
+            <a:avLst/>
+          </a:prstGeom>
+          <a:noFill/>
+          <a:ln/>
+        </p:spPr>
+        <p:txBody>
+          <a:bodyPr wrap="square" lIns="0" tIns="0" rIns="0" bIns="0" rtlCol="0" anchor="t"/>
+          <a:lstStyle/>
+          <a:p>
+            <a:pPr indent="0" marL="0">
+              <a:buNone/>
+            </a:pPr>
+            <a:r>
+              <a:rPr lang="en-US" sz="950" dirty="0">
+                <a:solidFill>
+                  <a:srgbClr val="9AA7BD"/>
+                </a:solidFill>
+                <a:latin typeface="Calibri" pitchFamily="34" charset="0"/>
+                <a:ea typeface="Calibri" pitchFamily="34" charset="-122"/>
+                <a:cs typeface="Calibri" pitchFamily="34" charset="-120"/>
+              </a:rPr>
+              <a:t>Machine sizing · stock · setups</a:t>
+            </a:r>
+            <a:endParaRPr lang="en-US" sz="950" dirty="0"/>
+          </a:p>
+        </p:txBody>
+      </p:sp>
+      <p:sp>
+        <p:nvSpPr>
+          <p:cNvPr id="23" name="Shape 21"/>
+          <p:cNvSpPr/>
+          <p:nvPr/>
+        </p:nvSpPr>
+        <p:spPr>
+          <a:xfrm>
+            <a:off x="411480" y="3465576"/>
+            <a:ext cx="6766560" cy="384048"/>
+          </a:xfrm>
+          <a:prstGeom prst="roundRect">
+            <a:avLst>
+              <a:gd name="adj" fmla="val 16667"/>
+            </a:avLst>
+          </a:prstGeom>
+          <a:solidFill>
+            <a:srgbClr val="141B28"/>
+          </a:solidFill>
+          <a:ln w="6350">
+            <a:solidFill>
+              <a:srgbClr val="2B3A52"/>
+            </a:solidFill>
+            <a:prstDash val="solid"/>
+          </a:ln>
+        </p:spPr>
+      </p:sp>
+      <p:sp>
+        <p:nvSpPr>
+          <p:cNvPr id="24" name="Text 22"/>
+          <p:cNvSpPr/>
+          <p:nvPr/>
+        </p:nvSpPr>
+        <p:spPr>
+          <a:xfrm>
+            <a:off x="548640" y="3547872"/>
+            <a:ext cx="3611880" cy="256032"/>
+          </a:xfrm>
+          <a:prstGeom prst="rect">
+            <a:avLst/>
+          </a:prstGeom>
+          <a:noFill/>
+          <a:ln/>
+        </p:spPr>
+        <p:txBody>
+          <a:bodyPr wrap="square" lIns="0" tIns="0" rIns="0" bIns="0" rtlCol="0" anchor="t"/>
+          <a:lstStyle/>
+          <a:p>
+            <a:pPr indent="0" marL="0">
+              <a:buNone/>
+            </a:pPr>
+            <a:r>
+              <a:rPr lang="en-US" sz="950" b="1" dirty="0">
+                <a:solidFill>
+                  <a:srgbClr val="3B82F6"/>
+                </a:solidFill>
+                <a:latin typeface="Calibri" pitchFamily="34" charset="0"/>
+                <a:ea typeface="Calibri" pitchFamily="34" charset="-122"/>
+                <a:cs typeface="Calibri" pitchFamily="34" charset="-120"/>
+              </a:rPr>
+              <a:t>Body / component count</a:t>
+            </a:r>
+            <a:endParaRPr lang="en-US" sz="950" dirty="0"/>
+          </a:p>
+        </p:txBody>
+      </p:sp>
+      <p:sp>
+        <p:nvSpPr>
+          <p:cNvPr id="25" name="Text 23"/>
+          <p:cNvSpPr/>
+          <p:nvPr/>
+        </p:nvSpPr>
+        <p:spPr>
+          <a:xfrm>
+            <a:off x="4297680" y="3547872"/>
+            <a:ext cx="2880360" cy="256032"/>
+          </a:xfrm>
+          <a:prstGeom prst="rect">
+            <a:avLst/>
+          </a:prstGeom>
+          <a:noFill/>
+          <a:ln/>
+        </p:spPr>
+        <p:txBody>
+          <a:bodyPr wrap="square" lIns="0" tIns="0" rIns="0" bIns="0" rtlCol="0" anchor="t"/>
+          <a:lstStyle/>
+          <a:p>
+            <a:pPr indent="0" marL="0">
+              <a:buNone/>
+            </a:pPr>
+            <a:r>
+              <a:rPr lang="en-US" sz="950" dirty="0">
+                <a:solidFill>
+                  <a:srgbClr val="9AA7BD"/>
+                </a:solidFill>
+                <a:latin typeface="Calibri" pitchFamily="34" charset="0"/>
+                <a:ea typeface="Calibri" pitchFamily="34" charset="-122"/>
+                <a:cs typeface="Calibri" pitchFamily="34" charset="-120"/>
+              </a:rPr>
+              <a:t>Assembly cost · BOM line count</a:t>
+            </a:r>
+            <a:endParaRPr lang="en-US" sz="950" dirty="0"/>
+          </a:p>
+        </p:txBody>
+      </p:sp>
+      <p:sp>
+        <p:nvSpPr>
+          <p:cNvPr id="26" name="Shape 24"/>
+          <p:cNvSpPr/>
+          <p:nvPr/>
+        </p:nvSpPr>
+        <p:spPr>
+          <a:xfrm>
+            <a:off x="411480" y="3886200"/>
+            <a:ext cx="6766560" cy="384048"/>
+          </a:xfrm>
+          <a:prstGeom prst="roundRect">
+            <a:avLst>
+              <a:gd name="adj" fmla="val 16667"/>
+            </a:avLst>
+          </a:prstGeom>
+          <a:solidFill>
+            <a:srgbClr val="141B28"/>
+          </a:solidFill>
+          <a:ln w="6350">
+            <a:solidFill>
+              <a:srgbClr val="2B3A52"/>
+            </a:solidFill>
+            <a:prstDash val="solid"/>
+          </a:ln>
+        </p:spPr>
+      </p:sp>
+      <p:sp>
+        <p:nvSpPr>
+          <p:cNvPr id="27" name="Text 25"/>
+          <p:cNvSpPr/>
+          <p:nvPr/>
+        </p:nvSpPr>
+        <p:spPr>
+          <a:xfrm>
+            <a:off x="548640" y="3968496"/>
+            <a:ext cx="3611880" cy="256032"/>
+          </a:xfrm>
+          <a:prstGeom prst="rect">
+            <a:avLst/>
+          </a:prstGeom>
+          <a:noFill/>
+          <a:ln/>
+        </p:spPr>
+        <p:txBody>
+          <a:bodyPr wrap="square" lIns="0" tIns="0" rIns="0" bIns="0" rtlCol="0" anchor="t"/>
+          <a:lstStyle/>
+          <a:p>
+            <a:pPr indent="0" marL="0">
+              <a:buNone/>
+            </a:pPr>
+            <a:r>
+              <a:rPr lang="en-US" sz="950" b="1" dirty="0">
+                <a:solidFill>
+                  <a:srgbClr val="3B82F6"/>
+                </a:solidFill>
+                <a:latin typeface="Calibri" pitchFamily="34" charset="0"/>
+                <a:ea typeface="Calibri" pitchFamily="34" charset="-122"/>
+                <a:cs typeface="Calibri" pitchFamily="34" charset="-120"/>
+              </a:rPr>
+              <a:t>Hole &amp; boss table — Ø, depth, count</a:t>
+            </a:r>
+            <a:endParaRPr lang="en-US" sz="950" dirty="0"/>
+          </a:p>
+        </p:txBody>
+      </p:sp>
+      <p:sp>
+        <p:nvSpPr>
+          <p:cNvPr id="28" name="Text 26"/>
+          <p:cNvSpPr/>
+          <p:nvPr/>
+        </p:nvSpPr>
+        <p:spPr>
+          <a:xfrm>
+            <a:off x="4297680" y="3968496"/>
+            <a:ext cx="2880360" cy="256032"/>
+          </a:xfrm>
+          <a:prstGeom prst="rect">
+            <a:avLst/>
+          </a:prstGeom>
+          <a:noFill/>
+          <a:ln/>
+        </p:spPr>
+        <p:txBody>
+          <a:bodyPr wrap="square" lIns="0" tIns="0" rIns="0" bIns="0" rtlCol="0" anchor="t"/>
+          <a:lstStyle/>
+          <a:p>
+            <a:pPr indent="0" marL="0">
+              <a:buNone/>
+            </a:pPr>
+            <a:r>
+              <a:rPr lang="en-US" sz="950" dirty="0">
+                <a:solidFill>
+                  <a:srgbClr val="9AA7BD"/>
+                </a:solidFill>
+                <a:latin typeface="Calibri" pitchFamily="34" charset="0"/>
+                <a:ea typeface="Calibri" pitchFamily="34" charset="-122"/>
+                <a:cs typeface="Calibri" pitchFamily="34" charset="-120"/>
+              </a:rPr>
+              <a:t>Drill / bore / tap operations</a:t>
+            </a:r>
+            <a:endParaRPr lang="en-US" sz="950" dirty="0"/>
+          </a:p>
+        </p:txBody>
+      </p:sp>
+      <p:sp>
+        <p:nvSpPr>
+          <p:cNvPr id="29" name="Shape 27"/>
+          <p:cNvSpPr/>
+          <p:nvPr/>
+        </p:nvSpPr>
+        <p:spPr>
+          <a:xfrm>
+            <a:off x="411480" y="4306824"/>
+            <a:ext cx="6766560" cy="384048"/>
+          </a:xfrm>
+          <a:prstGeom prst="roundRect">
+            <a:avLst>
+              <a:gd name="adj" fmla="val 16667"/>
+            </a:avLst>
+          </a:prstGeom>
+          <a:solidFill>
+            <a:srgbClr val="141B28"/>
+          </a:solidFill>
+          <a:ln w="6350">
+            <a:solidFill>
+              <a:srgbClr val="2B3A52"/>
+            </a:solidFill>
+            <a:prstDash val="solid"/>
+          </a:ln>
+        </p:spPr>
+      </p:sp>
+      <p:sp>
+        <p:nvSpPr>
+          <p:cNvPr id="30" name="Text 28"/>
+          <p:cNvSpPr/>
+          <p:nvPr/>
+        </p:nvSpPr>
+        <p:spPr>
+          <a:xfrm>
+            <a:off x="548640" y="4389120"/>
+            <a:ext cx="3611880" cy="256032"/>
+          </a:xfrm>
+          <a:prstGeom prst="rect">
+            <a:avLst/>
+          </a:prstGeom>
+          <a:noFill/>
+          <a:ln/>
+        </p:spPr>
+        <p:txBody>
+          <a:bodyPr wrap="square" lIns="0" tIns="0" rIns="0" bIns="0" rtlCol="0" anchor="t"/>
+          <a:lstStyle/>
+          <a:p>
+            <a:pPr indent="0" marL="0">
+              <a:buNone/>
+            </a:pPr>
+            <a:r>
+              <a:rPr lang="en-US" sz="950" b="1" dirty="0">
+                <a:solidFill>
+                  <a:srgbClr val="3B82F6"/>
+                </a:solidFill>
+                <a:latin typeface="Calibri" pitchFamily="34" charset="0"/>
+                <a:ea typeface="Calibri" pitchFamily="34" charset="-122"/>
+                <a:cs typeface="Calibri" pitchFamily="34" charset="-120"/>
+              </a:rPr>
+              <a:t>Wall thickness — min/mean/heatmap</a:t>
+            </a:r>
+            <a:endParaRPr lang="en-US" sz="950" dirty="0"/>
+          </a:p>
+        </p:txBody>
+      </p:sp>
+      <p:sp>
+        <p:nvSpPr>
+          <p:cNvPr id="31" name="Text 29"/>
+          <p:cNvSpPr/>
+          <p:nvPr/>
+        </p:nvSpPr>
+        <p:spPr>
+          <a:xfrm>
+            <a:off x="4297680" y="4389120"/>
+            <a:ext cx="2880360" cy="256032"/>
+          </a:xfrm>
+          <a:prstGeom prst="rect">
+            <a:avLst/>
+          </a:prstGeom>
+          <a:noFill/>
+          <a:ln/>
+        </p:spPr>
+        <p:txBody>
+          <a:bodyPr wrap="square" lIns="0" tIns="0" rIns="0" bIns="0" rtlCol="0" anchor="t"/>
+          <a:lstStyle/>
+          <a:p>
+            <a:pPr indent="0" marL="0">
+              <a:buNone/>
+            </a:pPr>
+            <a:r>
+              <a:rPr lang="en-US" sz="950" dirty="0">
+                <a:solidFill>
+                  <a:srgbClr val="9AA7BD"/>
+                </a:solidFill>
+                <a:latin typeface="Calibri" pitchFamily="34" charset="0"/>
+                <a:ea typeface="Calibri" pitchFamily="34" charset="-122"/>
+                <a:cs typeface="Calibri" pitchFamily="34" charset="-120"/>
+              </a:rPr>
+              <a:t>Mould &amp; cast feasibility · cooling</a:t>
+            </a:r>
+            <a:endParaRPr lang="en-US" sz="950" dirty="0"/>
+          </a:p>
+        </p:txBody>
+      </p:sp>
+      <p:sp>
+        <p:nvSpPr>
+          <p:cNvPr id="32" name="Shape 30"/>
+          <p:cNvSpPr/>
+          <p:nvPr/>
+        </p:nvSpPr>
+        <p:spPr>
+          <a:xfrm>
+            <a:off x="411480" y="4727448"/>
+            <a:ext cx="6766560" cy="384048"/>
+          </a:xfrm>
+          <a:prstGeom prst="roundRect">
+            <a:avLst>
+              <a:gd name="adj" fmla="val 16667"/>
+            </a:avLst>
+          </a:prstGeom>
+          <a:solidFill>
+            <a:srgbClr val="141B28"/>
+          </a:solidFill>
+          <a:ln w="6350">
+            <a:solidFill>
+              <a:srgbClr val="2B3A52"/>
+            </a:solidFill>
+            <a:prstDash val="solid"/>
+          </a:ln>
+        </p:spPr>
+      </p:sp>
+      <p:sp>
+        <p:nvSpPr>
+          <p:cNvPr id="33" name="Text 31"/>
+          <p:cNvSpPr/>
+          <p:nvPr/>
+        </p:nvSpPr>
+        <p:spPr>
+          <a:xfrm>
+            <a:off x="548640" y="4809744"/>
+            <a:ext cx="3611880" cy="256032"/>
+          </a:xfrm>
+          <a:prstGeom prst="rect">
+            <a:avLst/>
+          </a:prstGeom>
+          <a:noFill/>
+          <a:ln/>
+        </p:spPr>
+        <p:txBody>
+          <a:bodyPr wrap="square" lIns="0" tIns="0" rIns="0" bIns="0" rtlCol="0" anchor="t"/>
+          <a:lstStyle/>
+          <a:p>
+            <a:pPr indent="0" marL="0">
+              <a:buNone/>
+            </a:pPr>
+            <a:r>
+              <a:rPr lang="en-US" sz="950" b="1" dirty="0">
+                <a:solidFill>
+                  <a:srgbClr val="3B82F6"/>
+                </a:solidFill>
+                <a:latin typeface="Calibri" pitchFamily="34" charset="0"/>
+                <a:ea typeface="Calibri" pitchFamily="34" charset="-122"/>
+                <a:cs typeface="Calibri" pitchFamily="34" charset="-120"/>
+              </a:rPr>
+              <a:t>Draft &amp; undercut analysis</a:t>
+            </a:r>
+            <a:endParaRPr lang="en-US" sz="950" dirty="0"/>
+          </a:p>
+        </p:txBody>
+      </p:sp>
+      <p:sp>
+        <p:nvSpPr>
+          <p:cNvPr id="34" name="Text 32"/>
+          <p:cNvSpPr/>
+          <p:nvPr/>
+        </p:nvSpPr>
+        <p:spPr>
+          <a:xfrm>
+            <a:off x="4297680" y="4809744"/>
+            <a:ext cx="2880360" cy="256032"/>
+          </a:xfrm>
+          <a:prstGeom prst="rect">
+            <a:avLst/>
+          </a:prstGeom>
+          <a:noFill/>
+          <a:ln/>
+        </p:spPr>
+        <p:txBody>
+          <a:bodyPr wrap="square" lIns="0" tIns="0" rIns="0" bIns="0" rtlCol="0" anchor="t"/>
+          <a:lstStyle/>
+          <a:p>
+            <a:pPr indent="0" marL="0">
+              <a:buNone/>
+            </a:pPr>
+            <a:r>
+              <a:rPr lang="en-US" sz="950" dirty="0">
+                <a:solidFill>
+                  <a:srgbClr val="9AA7BD"/>
+                </a:solidFill>
+                <a:latin typeface="Calibri" pitchFamily="34" charset="0"/>
+                <a:ea typeface="Calibri" pitchFamily="34" charset="-122"/>
+                <a:cs typeface="Calibri" pitchFamily="34" charset="-120"/>
+              </a:rPr>
+              <a:t>Tooling complexity — slides</a:t>
+            </a:r>
+            <a:endParaRPr lang="en-US" sz="950" dirty="0"/>
+          </a:p>
+        </p:txBody>
+      </p:sp>
+      <p:sp>
+        <p:nvSpPr>
+          <p:cNvPr id="35" name="Shape 33"/>
+          <p:cNvSpPr/>
+          <p:nvPr/>
+        </p:nvSpPr>
+        <p:spPr>
+          <a:xfrm>
+            <a:off x="411480" y="5148072"/>
+            <a:ext cx="6766560" cy="384048"/>
+          </a:xfrm>
+          <a:prstGeom prst="roundRect">
+            <a:avLst>
+              <a:gd name="adj" fmla="val 16667"/>
+            </a:avLst>
+          </a:prstGeom>
+          <a:solidFill>
+            <a:srgbClr val="141B28"/>
+          </a:solidFill>
+          <a:ln w="6350">
+            <a:solidFill>
+              <a:srgbClr val="2B3A52"/>
+            </a:solidFill>
+            <a:prstDash val="solid"/>
+          </a:ln>
+        </p:spPr>
+      </p:sp>
+      <p:sp>
+        <p:nvSpPr>
+          <p:cNvPr id="36" name="Text 34"/>
+          <p:cNvSpPr/>
+          <p:nvPr/>
+        </p:nvSpPr>
+        <p:spPr>
+          <a:xfrm>
+            <a:off x="548640" y="5230368"/>
+            <a:ext cx="3611880" cy="256032"/>
+          </a:xfrm>
+          <a:prstGeom prst="rect">
+            <a:avLst/>
+          </a:prstGeom>
+          <a:noFill/>
+          <a:ln/>
+        </p:spPr>
+        <p:txBody>
+          <a:bodyPr wrap="square" lIns="0" tIns="0" rIns="0" bIns="0" rtlCol="0" anchor="t"/>
+          <a:lstStyle/>
+          <a:p>
+            <a:pPr indent="0" marL="0">
+              <a:buNone/>
+            </a:pPr>
+            <a:r>
+              <a:rPr lang="en-US" sz="950" b="1" dirty="0">
+                <a:solidFill>
+                  <a:srgbClr val="3B82F6"/>
+                </a:solidFill>
+                <a:latin typeface="Calibri" pitchFamily="34" charset="0"/>
+                <a:ea typeface="Calibri" pitchFamily="34" charset="-122"/>
+                <a:cs typeface="Calibri" pitchFamily="34" charset="-120"/>
+              </a:rPr>
+              <a:t>Face-type areas (planar/cyl)</a:t>
+            </a:r>
+            <a:endParaRPr lang="en-US" sz="950" dirty="0"/>
+          </a:p>
+        </p:txBody>
+      </p:sp>
+      <p:sp>
+        <p:nvSpPr>
+          <p:cNvPr id="37" name="Text 35"/>
+          <p:cNvSpPr/>
+          <p:nvPr/>
+        </p:nvSpPr>
+        <p:spPr>
+          <a:xfrm>
+            <a:off x="4297680" y="5230368"/>
+            <a:ext cx="2880360" cy="256032"/>
+          </a:xfrm>
+          <a:prstGeom prst="rect">
+            <a:avLst/>
+          </a:prstGeom>
+          <a:noFill/>
+          <a:ln/>
+        </p:spPr>
+        <p:txBody>
+          <a:bodyPr wrap="square" lIns="0" tIns="0" rIns="0" bIns="0" rtlCol="0" anchor="t"/>
+          <a:lstStyle/>
+          <a:p>
+            <a:pPr indent="0" marL="0">
+              <a:buNone/>
+            </a:pPr>
+            <a:r>
+              <a:rPr lang="en-US" sz="950" dirty="0">
+                <a:solidFill>
+                  <a:srgbClr val="9AA7BD"/>
+                </a:solidFill>
+                <a:latin typeface="Calibri" pitchFamily="34" charset="0"/>
+                <a:ea typeface="Calibri" pitchFamily="34" charset="-122"/>
+                <a:cs typeface="Calibri" pitchFamily="34" charset="-120"/>
+              </a:rPr>
+              <a:t>Machining area · paint area</a:t>
+            </a:r>
+            <a:endParaRPr lang="en-US" sz="950" dirty="0"/>
+          </a:p>
+        </p:txBody>
+      </p:sp>
+      <p:sp>
+        <p:nvSpPr>
+          <p:cNvPr id="38" name="Shape 36"/>
+          <p:cNvSpPr/>
+          <p:nvPr/>
+        </p:nvSpPr>
+        <p:spPr>
+          <a:xfrm>
+            <a:off x="411480" y="5568696"/>
+            <a:ext cx="6766560" cy="384048"/>
+          </a:xfrm>
+          <a:prstGeom prst="roundRect">
+            <a:avLst>
+              <a:gd name="adj" fmla="val 16667"/>
+            </a:avLst>
+          </a:prstGeom>
+          <a:solidFill>
+            <a:srgbClr val="141B28"/>
+          </a:solidFill>
+          <a:ln w="6350">
+            <a:solidFill>
+              <a:srgbClr val="2B3A52"/>
+            </a:solidFill>
+            <a:prstDash val="solid"/>
+          </a:ln>
+        </p:spPr>
+      </p:sp>
+      <p:sp>
+        <p:nvSpPr>
+          <p:cNvPr id="39" name="Text 37"/>
+          <p:cNvSpPr/>
+          <p:nvPr/>
+        </p:nvSpPr>
+        <p:spPr>
+          <a:xfrm>
+            <a:off x="548640" y="5650992"/>
+            <a:ext cx="3611880" cy="256032"/>
+          </a:xfrm>
+          <a:prstGeom prst="rect">
+            <a:avLst/>
+          </a:prstGeom>
+          <a:noFill/>
+          <a:ln/>
+        </p:spPr>
+        <p:txBody>
+          <a:bodyPr wrap="square" lIns="0" tIns="0" rIns="0" bIns="0" rtlCol="0" anchor="t"/>
+          <a:lstStyle/>
+          <a:p>
+            <a:pPr indent="0" marL="0">
+              <a:buNone/>
+            </a:pPr>
+            <a:r>
+              <a:rPr lang="en-US" sz="950" b="1" dirty="0">
+                <a:solidFill>
+                  <a:srgbClr val="3B82F6"/>
+                </a:solidFill>
+                <a:latin typeface="Calibri" pitchFamily="34" charset="0"/>
+                <a:ea typeface="Calibri" pitchFamily="34" charset="-122"/>
+                <a:cs typeface="Calibri" pitchFamily="34" charset="-120"/>
+              </a:rPr>
+              <a:t>CNC cycle-time &amp; setup estimate</a:t>
+            </a:r>
+            <a:endParaRPr lang="en-US" sz="950" dirty="0"/>
+          </a:p>
+        </p:txBody>
+      </p:sp>
+      <p:sp>
+        <p:nvSpPr>
+          <p:cNvPr id="40" name="Text 38"/>
+          <p:cNvSpPr/>
+          <p:nvPr/>
+        </p:nvSpPr>
+        <p:spPr>
+          <a:xfrm>
+            <a:off x="4297680" y="5650992"/>
+            <a:ext cx="2880360" cy="256032"/>
+          </a:xfrm>
+          <a:prstGeom prst="rect">
+            <a:avLst/>
+          </a:prstGeom>
+          <a:noFill/>
+          <a:ln/>
+        </p:spPr>
+        <p:txBody>
+          <a:bodyPr wrap="square" lIns="0" tIns="0" rIns="0" bIns="0" rtlCol="0" anchor="t"/>
+          <a:lstStyle/>
+          <a:p>
+            <a:pPr indent="0" marL="0">
+              <a:buNone/>
+            </a:pPr>
+            <a:r>
+              <a:rPr lang="en-US" sz="950" dirty="0">
+                <a:solidFill>
+                  <a:srgbClr val="9AA7BD"/>
+                </a:solidFill>
+                <a:latin typeface="Calibri" pitchFamily="34" charset="0"/>
+                <a:ea typeface="Calibri" pitchFamily="34" charset="-122"/>
+                <a:cs typeface="Calibri" pitchFamily="34" charset="-120"/>
+              </a:rPr>
+              <a:t>Process-time baseline</a:t>
+            </a:r>
+            <a:endParaRPr lang="en-US" sz="950" dirty="0"/>
+          </a:p>
+        </p:txBody>
+      </p:sp>
+      <p:sp>
+        <p:nvSpPr>
+          <p:cNvPr id="41" name="Shape 39"/>
+          <p:cNvSpPr/>
+          <p:nvPr/>
+        </p:nvSpPr>
+        <p:spPr>
+          <a:xfrm>
+            <a:off x="7360920" y="1783080"/>
+            <a:ext cx="4434840" cy="2514600"/>
+          </a:xfrm>
+          <a:prstGeom prst="roundRect">
+            <a:avLst>
+              <a:gd name="adj" fmla="val 2545"/>
+            </a:avLst>
+          </a:prstGeom>
+          <a:solidFill>
+            <a:srgbClr val="1C2536"/>
+          </a:solidFill>
+          <a:ln w="9525">
+            <a:solidFill>
+              <a:srgbClr val="2B3A52"/>
+            </a:solidFill>
+            <a:prstDash val="solid"/>
+          </a:ln>
+        </p:spPr>
+      </p:sp>
+      <p:sp>
+        <p:nvSpPr>
+          <p:cNvPr id="42" name="Shape 40"/>
+          <p:cNvSpPr/>
+          <p:nvPr/>
+        </p:nvSpPr>
+        <p:spPr>
+          <a:xfrm>
+            <a:off x="7360920" y="1783080"/>
+            <a:ext cx="64008" cy="2514600"/>
+          </a:xfrm>
+          <a:prstGeom prst="rect">
+            <a:avLst/>
+          </a:prstGeom>
+          <a:solidFill>
+            <a:srgbClr val="3B82F6"/>
+          </a:solidFill>
+          <a:ln/>
+        </p:spPr>
+      </p:sp>
+      <p:sp>
+        <p:nvSpPr>
+          <p:cNvPr id="43" name="Text 41"/>
+          <p:cNvSpPr/>
+          <p:nvPr/>
+        </p:nvSpPr>
+        <p:spPr>
+          <a:xfrm>
+            <a:off x="7543800" y="1892808"/>
+            <a:ext cx="4123944" cy="365760"/>
+          </a:xfrm>
+          <a:prstGeom prst="rect">
+            <a:avLst/>
+          </a:prstGeom>
+          <a:noFill/>
+          <a:ln/>
+        </p:spPr>
+        <p:txBody>
+          <a:bodyPr wrap="square" lIns="0" tIns="0" rIns="0" bIns="0" rtlCol="0" anchor="t"/>
+          <a:lstStyle/>
+          <a:p>
+            <a:pPr indent="0" marL="0">
+              <a:buNone/>
+            </a:pPr>
+            <a:r>
+              <a:rPr lang="en-US" sz="950" b="1" dirty="0">
+                <a:solidFill>
+                  <a:srgbClr val="EAF0F8"/>
+                </a:solidFill>
+                <a:latin typeface="Calibri" pitchFamily="34" charset="0"/>
+                <a:ea typeface="Calibri" pitchFamily="34" charset="-122"/>
+                <a:cs typeface="Calibri" pitchFamily="34" charset="-120"/>
+              </a:rPr>
+              <a:t>Worked example — Spur Gear (m3 · z38)</a:t>
+            </a:r>
+            <a:endParaRPr lang="en-US" sz="950" dirty="0"/>
+          </a:p>
+        </p:txBody>
+      </p:sp>
+      <p:sp>
+        <p:nvSpPr>
+          <p:cNvPr id="44" name="Text 42"/>
+          <p:cNvSpPr/>
+          <p:nvPr/>
+        </p:nvSpPr>
+        <p:spPr>
+          <a:xfrm>
+            <a:off x="7543800" y="2203704"/>
+            <a:ext cx="4123944" cy="2057400"/>
+          </a:xfrm>
+          <a:prstGeom prst="rect">
+            <a:avLst/>
+          </a:prstGeom>
+          <a:noFill/>
+          <a:ln/>
+        </p:spPr>
+        <p:txBody>
+          <a:bodyPr wrap="square" lIns="0" tIns="0" rIns="0" bIns="0" rtlCol="0" anchor="t"/>
+          <a:lstStyle/>
+          <a:p>
+            <a:pPr indent="0" marL="0">
+              <a:lnSpc>
+                <a:spcPct val="106000"/>
+              </a:lnSpc>
+              <a:buNone/>
+            </a:pPr>
+            <a:r>
+              <a:rPr lang="en-US" sz="950" dirty="0">
+                <a:solidFill>
+                  <a:srgbClr val="9AA7BD"/>
+                </a:solidFill>
+                <a:latin typeface="Calibri" pitchFamily="34" charset="0"/>
+                <a:ea typeface="Calibri" pitchFamily="34" charset="-122"/>
+                <a:cs typeface="Calibri" pitchFamily="34" charset="-120"/>
+              </a:rPr>
+              <a:t>20MnCr5 case-hardening steel — captured automatically:</a:t>
+            </a:r>
+            <a:endParaRPr lang="en-US" sz="950" dirty="0"/>
+          </a:p>
+          <a:p>
+            <a:pPr indent="0" marL="0">
+              <a:lnSpc>
+                <a:spcPct val="106000"/>
+              </a:lnSpc>
+              <a:buNone/>
+            </a:pPr>
+            <a:r>
+              <a:rPr lang="en-US" sz="950" dirty="0">
+                <a:solidFill>
+                  <a:srgbClr val="9AA7BD"/>
+                </a:solidFill>
+                <a:latin typeface="Calibri" pitchFamily="34" charset="0"/>
+                <a:ea typeface="Calibri" pitchFamily="34" charset="-122"/>
+                <a:cs typeface="Calibri" pitchFamily="34" charset="-120"/>
+              </a:rPr>
+              <a:t>  Volume 264.9 cm³  ·  Weight 2.08 kg</a:t>
+            </a:r>
+            <a:endParaRPr lang="en-US" sz="950" dirty="0"/>
+          </a:p>
+          <a:p>
+            <a:pPr indent="0" marL="0">
+              <a:lnSpc>
+                <a:spcPct val="106000"/>
+              </a:lnSpc>
+              <a:buNone/>
+            </a:pPr>
+            <a:r>
+              <a:rPr lang="en-US" sz="950" dirty="0">
+                <a:solidFill>
+                  <a:srgbClr val="9AA7BD"/>
+                </a:solidFill>
+                <a:latin typeface="Calibri" pitchFamily="34" charset="0"/>
+                <a:ea typeface="Calibri" pitchFamily="34" charset="-122"/>
+                <a:cs typeface="Calibri" pitchFamily="34" charset="-120"/>
+              </a:rPr>
+              <a:t>  Envelope 120 × 120 × 30 mm  ·  1 body</a:t>
+            </a:r>
+            <a:endParaRPr lang="en-US" sz="950" dirty="0"/>
+          </a:p>
+          <a:p>
+            <a:pPr indent="0" marL="0">
+              <a:lnSpc>
+                <a:spcPct val="106000"/>
+              </a:lnSpc>
+              <a:buNone/>
+            </a:pPr>
+            <a:endParaRPr lang="en-US" sz="950" dirty="0"/>
+          </a:p>
+          <a:p>
+            <a:pPr indent="0" marL="0">
+              <a:lnSpc>
+                <a:spcPct val="106000"/>
+              </a:lnSpc>
+              <a:buNone/>
+            </a:pPr>
+            <a:r>
+              <a:rPr lang="en-US" sz="950" dirty="0">
+                <a:solidFill>
+                  <a:srgbClr val="9AA7BD"/>
+                </a:solidFill>
+                <a:latin typeface="Calibri" pitchFamily="34" charset="0"/>
+                <a:ea typeface="Calibri" pitchFamily="34" charset="-122"/>
+                <a:cs typeface="Calibri" pitchFamily="34" charset="-120"/>
+              </a:rPr>
+              <a:t>→ Should-cost, India ex-works (GBP):</a:t>
+            </a:r>
+            <a:endParaRPr lang="en-US" sz="950" dirty="0"/>
+          </a:p>
+          <a:p>
+            <a:pPr indent="0" marL="0">
+              <a:lnSpc>
+                <a:spcPct val="106000"/>
+              </a:lnSpc>
+              <a:buNone/>
+            </a:pPr>
+            <a:r>
+              <a:rPr lang="en-US" sz="950" dirty="0">
+                <a:solidFill>
+                  <a:srgbClr val="9AA7BD"/>
+                </a:solidFill>
+                <a:latin typeface="Calibri" pitchFamily="34" charset="0"/>
+                <a:ea typeface="Calibri" pitchFamily="34" charset="-122"/>
+                <a:cs typeface="Calibri" pitchFamily="34" charset="-120"/>
+              </a:rPr>
+              <a:t>  Material £3.36 · Process £11.40 · Labour £1.36</a:t>
+            </a:r>
+            <a:endParaRPr lang="en-US" sz="950" dirty="0"/>
+          </a:p>
+          <a:p>
+            <a:pPr indent="0" marL="0">
+              <a:lnSpc>
+                <a:spcPct val="106000"/>
+              </a:lnSpc>
+              <a:buNone/>
+            </a:pPr>
+            <a:r>
+              <a:rPr lang="en-US" sz="950" dirty="0">
+                <a:solidFill>
+                  <a:srgbClr val="9AA7BD"/>
+                </a:solidFill>
+                <a:latin typeface="Calibri" pitchFamily="34" charset="0"/>
+                <a:ea typeface="Calibri" pitchFamily="34" charset="-122"/>
+                <a:cs typeface="Calibri" pitchFamily="34" charset="-120"/>
+              </a:rPr>
+              <a:t>  Overhead £1.95 · Margin £1.83  + heat-treat £1.77</a:t>
+            </a:r>
+            <a:endParaRPr lang="en-US" sz="950" dirty="0"/>
+          </a:p>
+          <a:p>
+            <a:pPr indent="0" marL="0">
+              <a:lnSpc>
+                <a:spcPct val="106000"/>
+              </a:lnSpc>
+              <a:buNone/>
+            </a:pPr>
+            <a:r>
+              <a:rPr lang="en-US" sz="950" dirty="0">
+                <a:solidFill>
+                  <a:srgbClr val="9AA7BD"/>
+                </a:solidFill>
+                <a:latin typeface="Calibri" pitchFamily="34" charset="0"/>
+                <a:ea typeface="Calibri" pitchFamily="34" charset="-122"/>
+                <a:cs typeface="Calibri" pitchFamily="34" charset="-120"/>
+              </a:rPr>
+              <a:t>  =  £21.90 / part  (≈ ₹2,398)  ·  £10.53 / kg</a:t>
+            </a:r>
+            <a:endParaRPr lang="en-US" sz="950" dirty="0"/>
+          </a:p>
+        </p:txBody>
+      </p:sp>
+      <p:sp>
+        <p:nvSpPr>
+          <p:cNvPr id="45" name="Shape 43"/>
+          <p:cNvSpPr/>
+          <p:nvPr/>
+        </p:nvSpPr>
+        <p:spPr>
+          <a:xfrm>
+            <a:off x="7360920" y="4434840"/>
+            <a:ext cx="4434840" cy="1508760"/>
+          </a:xfrm>
+          <a:prstGeom prst="roundRect">
+            <a:avLst>
+              <a:gd name="adj" fmla="val 4242"/>
+            </a:avLst>
+          </a:prstGeom>
+          <a:solidFill>
+            <a:srgbClr val="1C2536"/>
+          </a:solidFill>
+          <a:ln w="9525">
+            <a:solidFill>
+              <a:srgbClr val="2B3A52"/>
+            </a:solidFill>
+            <a:prstDash val="solid"/>
+          </a:ln>
+        </p:spPr>
+      </p:sp>
+      <p:sp>
+        <p:nvSpPr>
+          <p:cNvPr id="46" name="Shape 44"/>
+          <p:cNvSpPr/>
+          <p:nvPr/>
+        </p:nvSpPr>
+        <p:spPr>
+          <a:xfrm>
+            <a:off x="7360920" y="4434840"/>
+            <a:ext cx="64008" cy="1508760"/>
+          </a:xfrm>
+          <a:prstGeom prst="rect">
+            <a:avLst/>
+          </a:prstGeom>
+          <a:solidFill>
+            <a:srgbClr val="10B981"/>
+          </a:solidFill>
+          <a:ln/>
+        </p:spPr>
+      </p:sp>
+      <p:sp>
+        <p:nvSpPr>
+          <p:cNvPr id="47" name="Text 45"/>
+          <p:cNvSpPr/>
+          <p:nvPr/>
+        </p:nvSpPr>
+        <p:spPr>
+          <a:xfrm>
+            <a:off x="7543800" y="4544568"/>
+            <a:ext cx="4123944" cy="365760"/>
+          </a:xfrm>
+          <a:prstGeom prst="rect">
+            <a:avLst/>
+          </a:prstGeom>
+          <a:noFill/>
+          <a:ln/>
+        </p:spPr>
+        <p:txBody>
+          <a:bodyPr wrap="square" lIns="0" tIns="0" rIns="0" bIns="0" rtlCol="0" anchor="t"/>
+          <a:lstStyle/>
+          <a:p>
+            <a:pPr indent="0" marL="0">
+              <a:buNone/>
+            </a:pPr>
+            <a:r>
+              <a:rPr lang="en-US" sz="1050" b="1" dirty="0">
+                <a:solidFill>
+                  <a:srgbClr val="EAF0F8"/>
+                </a:solidFill>
+                <a:latin typeface="Calibri" pitchFamily="34" charset="0"/>
+                <a:ea typeface="Calibri" pitchFamily="34" charset="-122"/>
+                <a:cs typeface="Calibri" pitchFamily="34" charset="-120"/>
+              </a:rPr>
+              <a:t>The golden rule</a:t>
+            </a:r>
+            <a:endParaRPr lang="en-US" sz="1050" dirty="0"/>
+          </a:p>
+        </p:txBody>
+      </p:sp>
+      <p:sp>
+        <p:nvSpPr>
+          <p:cNvPr id="48" name="Text 46"/>
+          <p:cNvSpPr/>
+          <p:nvPr/>
+        </p:nvSpPr>
+        <p:spPr>
+          <a:xfrm>
+            <a:off x="7543800" y="4855464"/>
+            <a:ext cx="4123944" cy="1051560"/>
+          </a:xfrm>
+          <a:prstGeom prst="rect">
+            <a:avLst/>
+          </a:prstGeom>
+          <a:noFill/>
+          <a:ln/>
+        </p:spPr>
+        <p:txBody>
+          <a:bodyPr wrap="square" lIns="0" tIns="0" rIns="0" bIns="0" rtlCol="0" anchor="t"/>
+          <a:lstStyle/>
+          <a:p>
+            <a:pPr indent="0" marL="0">
+              <a:lnSpc>
+                <a:spcPct val="106000"/>
+              </a:lnSpc>
+              <a:buNone/>
+            </a:pPr>
+            <a:r>
+              <a:rPr lang="en-US" sz="950" dirty="0">
+                <a:solidFill>
+                  <a:srgbClr val="9AA7BD"/>
+                </a:solidFill>
+                <a:latin typeface="Calibri" pitchFamily="34" charset="0"/>
+                <a:ea typeface="Calibri" pitchFamily="34" charset="-122"/>
+                <a:cs typeface="Calibri" pitchFamily="34" charset="-120"/>
+              </a:rPr>
+              <a:t>AI never sets a price. It only classifies material &amp; process; every £ is deterministic arithmetic on the measured geometry, bounded and traceable to the rate library — which is what makes the output defensible.</a:t>
+            </a:r>
+            <a:endParaRPr lang="en-US" sz="950" dirty="0"/>
           </a:p>
         </p:txBody>
       </p:sp>
